--- a/docs/content/analysis_of_variance/anova_as_regression.pptx
+++ b/docs/content/analysis_of_variance/anova_as_regression.pptx
@@ -4203,7 +4203,7 @@
       </p:sp>
       <p:graphicFrame xmlns:a="http://schemas.openxmlformats.org/drawingml/2006/main" xmlns:r="http://schemas.openxmlformats.org/officeDocument/2006/relationships" xmlns:p="http://schemas.openxmlformats.org/presentationml/2006/main">
         <p:nvGraphicFramePr>
-          <p:cNvPr id="865357957" name=""/>
+          <p:cNvPr id="513525482" name=""/>
           <p:cNvGraphicFramePr>
             <a:graphicFrameLocks noGrp="true"/>
           </p:cNvGraphicFramePr>
@@ -4304,7 +4304,7 @@
       </p:sp>
       <p:graphicFrame xmlns:a="http://schemas.openxmlformats.org/drawingml/2006/main" xmlns:r="http://schemas.openxmlformats.org/officeDocument/2006/relationships" xmlns:p="http://schemas.openxmlformats.org/presentationml/2006/main">
         <p:nvGraphicFramePr>
-          <p:cNvPr id="242501497" name=""/>
+          <p:cNvPr id="634807870" name=""/>
           <p:cNvGraphicFramePr>
             <a:graphicFrameLocks noGrp="true"/>
           </p:cNvGraphicFramePr>
@@ -5187,7 +5187,7 @@
       </p:sp>
       <p:graphicFrame xmlns:a="http://schemas.openxmlformats.org/drawingml/2006/main" xmlns:r="http://schemas.openxmlformats.org/officeDocument/2006/relationships" xmlns:p="http://schemas.openxmlformats.org/presentationml/2006/main">
         <p:nvGraphicFramePr>
-          <p:cNvPr id="765776493" name=""/>
+          <p:cNvPr id="681627922" name=""/>
           <p:cNvGraphicFramePr>
             <a:graphicFrameLocks noGrp="true"/>
           </p:cNvGraphicFramePr>
@@ -6750,7 +6750,7 @@
       </p:sp>
       <p:graphicFrame xmlns:a="http://schemas.openxmlformats.org/drawingml/2006/main" xmlns:r="http://schemas.openxmlformats.org/officeDocument/2006/relationships" xmlns:p="http://schemas.openxmlformats.org/presentationml/2006/main">
         <p:nvGraphicFramePr>
-          <p:cNvPr id="619463370" name=""/>
+          <p:cNvPr id="867535992" name=""/>
           <p:cNvGraphicFramePr>
             <a:graphicFrameLocks noGrp="true"/>
           </p:cNvGraphicFramePr>

--- a/docs/content/analysis_of_variance/anova_as_regression.pptx
+++ b/docs/content/analysis_of_variance/anova_as_regression.pptx
@@ -4203,7 +4203,7 @@
       </p:sp>
       <p:graphicFrame xmlns:a="http://schemas.openxmlformats.org/drawingml/2006/main" xmlns:r="http://schemas.openxmlformats.org/officeDocument/2006/relationships" xmlns:p="http://schemas.openxmlformats.org/presentationml/2006/main">
         <p:nvGraphicFramePr>
-          <p:cNvPr id="513525482" name=""/>
+          <p:cNvPr id="449083396" name=""/>
           <p:cNvGraphicFramePr>
             <a:graphicFrameLocks noGrp="true"/>
           </p:cNvGraphicFramePr>
@@ -4304,7 +4304,7 @@
       </p:sp>
       <p:graphicFrame xmlns:a="http://schemas.openxmlformats.org/drawingml/2006/main" xmlns:r="http://schemas.openxmlformats.org/officeDocument/2006/relationships" xmlns:p="http://schemas.openxmlformats.org/presentationml/2006/main">
         <p:nvGraphicFramePr>
-          <p:cNvPr id="634807870" name=""/>
+          <p:cNvPr id="424756502" name=""/>
           <p:cNvGraphicFramePr>
             <a:graphicFrameLocks noGrp="true"/>
           </p:cNvGraphicFramePr>
@@ -5187,7 +5187,7 @@
       </p:sp>
       <p:graphicFrame xmlns:a="http://schemas.openxmlformats.org/drawingml/2006/main" xmlns:r="http://schemas.openxmlformats.org/officeDocument/2006/relationships" xmlns:p="http://schemas.openxmlformats.org/presentationml/2006/main">
         <p:nvGraphicFramePr>
-          <p:cNvPr id="681627922" name=""/>
+          <p:cNvPr id="550232250" name=""/>
           <p:cNvGraphicFramePr>
             <a:graphicFrameLocks noGrp="true"/>
           </p:cNvGraphicFramePr>
@@ -6750,7 +6750,7 @@
       </p:sp>
       <p:graphicFrame xmlns:a="http://schemas.openxmlformats.org/drawingml/2006/main" xmlns:r="http://schemas.openxmlformats.org/officeDocument/2006/relationships" xmlns:p="http://schemas.openxmlformats.org/presentationml/2006/main">
         <p:nvGraphicFramePr>
-          <p:cNvPr id="867535992" name=""/>
+          <p:cNvPr id="330633331" name=""/>
           <p:cNvGraphicFramePr>
             <a:graphicFrameLocks noGrp="true"/>
           </p:cNvGraphicFramePr>

--- a/docs/content/analysis_of_variance/anova_as_regression.pptx
+++ b/docs/content/analysis_of_variance/anova_as_regression.pptx
@@ -4203,7 +4203,7 @@
       </p:sp>
       <p:graphicFrame xmlns:a="http://schemas.openxmlformats.org/drawingml/2006/main" xmlns:r="http://schemas.openxmlformats.org/officeDocument/2006/relationships" xmlns:p="http://schemas.openxmlformats.org/presentationml/2006/main">
         <p:nvGraphicFramePr>
-          <p:cNvPr id="449083396" name=""/>
+          <p:cNvPr id="543300107" name=""/>
           <p:cNvGraphicFramePr>
             <a:graphicFrameLocks noGrp="true"/>
           </p:cNvGraphicFramePr>
@@ -4304,7 +4304,7 @@
       </p:sp>
       <p:graphicFrame xmlns:a="http://schemas.openxmlformats.org/drawingml/2006/main" xmlns:r="http://schemas.openxmlformats.org/officeDocument/2006/relationships" xmlns:p="http://schemas.openxmlformats.org/presentationml/2006/main">
         <p:nvGraphicFramePr>
-          <p:cNvPr id="424756502" name=""/>
+          <p:cNvPr id="495332381" name=""/>
           <p:cNvGraphicFramePr>
             <a:graphicFrameLocks noGrp="true"/>
           </p:cNvGraphicFramePr>
@@ -5187,7 +5187,7 @@
       </p:sp>
       <p:graphicFrame xmlns:a="http://schemas.openxmlformats.org/drawingml/2006/main" xmlns:r="http://schemas.openxmlformats.org/officeDocument/2006/relationships" xmlns:p="http://schemas.openxmlformats.org/presentationml/2006/main">
         <p:nvGraphicFramePr>
-          <p:cNvPr id="550232250" name=""/>
+          <p:cNvPr id="225761234" name=""/>
           <p:cNvGraphicFramePr>
             <a:graphicFrameLocks noGrp="true"/>
           </p:cNvGraphicFramePr>
@@ -6750,7 +6750,7 @@
       </p:sp>
       <p:graphicFrame xmlns:a="http://schemas.openxmlformats.org/drawingml/2006/main" xmlns:r="http://schemas.openxmlformats.org/officeDocument/2006/relationships" xmlns:p="http://schemas.openxmlformats.org/presentationml/2006/main">
         <p:nvGraphicFramePr>
-          <p:cNvPr id="330633331" name=""/>
+          <p:cNvPr id="512876484" name=""/>
           <p:cNvGraphicFramePr>
             <a:graphicFrameLocks noGrp="true"/>
           </p:cNvGraphicFramePr>

--- a/docs/content/analysis_of_variance/anova_as_regression.pptx
+++ b/docs/content/analysis_of_variance/anova_as_regression.pptx
@@ -4203,7 +4203,7 @@
       </p:sp>
       <p:graphicFrame xmlns:a="http://schemas.openxmlformats.org/drawingml/2006/main" xmlns:r="http://schemas.openxmlformats.org/officeDocument/2006/relationships" xmlns:p="http://schemas.openxmlformats.org/presentationml/2006/main">
         <p:nvGraphicFramePr>
-          <p:cNvPr id="543300107" name=""/>
+          <p:cNvPr id="232962299" name=""/>
           <p:cNvGraphicFramePr>
             <a:graphicFrameLocks noGrp="true"/>
           </p:cNvGraphicFramePr>
@@ -4304,7 +4304,7 @@
       </p:sp>
       <p:graphicFrame xmlns:a="http://schemas.openxmlformats.org/drawingml/2006/main" xmlns:r="http://schemas.openxmlformats.org/officeDocument/2006/relationships" xmlns:p="http://schemas.openxmlformats.org/presentationml/2006/main">
         <p:nvGraphicFramePr>
-          <p:cNvPr id="495332381" name=""/>
+          <p:cNvPr id="641705924" name=""/>
           <p:cNvGraphicFramePr>
             <a:graphicFrameLocks noGrp="true"/>
           </p:cNvGraphicFramePr>
@@ -5187,7 +5187,7 @@
       </p:sp>
       <p:graphicFrame xmlns:a="http://schemas.openxmlformats.org/drawingml/2006/main" xmlns:r="http://schemas.openxmlformats.org/officeDocument/2006/relationships" xmlns:p="http://schemas.openxmlformats.org/presentationml/2006/main">
         <p:nvGraphicFramePr>
-          <p:cNvPr id="225761234" name=""/>
+          <p:cNvPr id="159435858" name=""/>
           <p:cNvGraphicFramePr>
             <a:graphicFrameLocks noGrp="true"/>
           </p:cNvGraphicFramePr>
@@ -6750,7 +6750,7 @@
       </p:sp>
       <p:graphicFrame xmlns:a="http://schemas.openxmlformats.org/drawingml/2006/main" xmlns:r="http://schemas.openxmlformats.org/officeDocument/2006/relationships" xmlns:p="http://schemas.openxmlformats.org/presentationml/2006/main">
         <p:nvGraphicFramePr>
-          <p:cNvPr id="512876484" name=""/>
+          <p:cNvPr id="309749947" name=""/>
           <p:cNvGraphicFramePr>
             <a:graphicFrameLocks noGrp="true"/>
           </p:cNvGraphicFramePr>

--- a/docs/content/analysis_of_variance/anova_as_regression.pptx
+++ b/docs/content/analysis_of_variance/anova_as_regression.pptx
@@ -4203,7 +4203,7 @@
       </p:sp>
       <p:graphicFrame xmlns:a="http://schemas.openxmlformats.org/drawingml/2006/main" xmlns:r="http://schemas.openxmlformats.org/officeDocument/2006/relationships" xmlns:p="http://schemas.openxmlformats.org/presentationml/2006/main">
         <p:nvGraphicFramePr>
-          <p:cNvPr id="232962299" name=""/>
+          <p:cNvPr id="263832832" name=""/>
           <p:cNvGraphicFramePr>
             <a:graphicFrameLocks noGrp="true"/>
           </p:cNvGraphicFramePr>
@@ -4304,7 +4304,7 @@
       </p:sp>
       <p:graphicFrame xmlns:a="http://schemas.openxmlformats.org/drawingml/2006/main" xmlns:r="http://schemas.openxmlformats.org/officeDocument/2006/relationships" xmlns:p="http://schemas.openxmlformats.org/presentationml/2006/main">
         <p:nvGraphicFramePr>
-          <p:cNvPr id="641705924" name=""/>
+          <p:cNvPr id="871969763" name=""/>
           <p:cNvGraphicFramePr>
             <a:graphicFrameLocks noGrp="true"/>
           </p:cNvGraphicFramePr>
@@ -5187,7 +5187,7 @@
       </p:sp>
       <p:graphicFrame xmlns:a="http://schemas.openxmlformats.org/drawingml/2006/main" xmlns:r="http://schemas.openxmlformats.org/officeDocument/2006/relationships" xmlns:p="http://schemas.openxmlformats.org/presentationml/2006/main">
         <p:nvGraphicFramePr>
-          <p:cNvPr id="159435858" name=""/>
+          <p:cNvPr id="95619347" name=""/>
           <p:cNvGraphicFramePr>
             <a:graphicFrameLocks noGrp="true"/>
           </p:cNvGraphicFramePr>
@@ -6750,7 +6750,7 @@
       </p:sp>
       <p:graphicFrame xmlns:a="http://schemas.openxmlformats.org/drawingml/2006/main" xmlns:r="http://schemas.openxmlformats.org/officeDocument/2006/relationships" xmlns:p="http://schemas.openxmlformats.org/presentationml/2006/main">
         <p:nvGraphicFramePr>
-          <p:cNvPr id="309749947" name=""/>
+          <p:cNvPr id="389767074" name=""/>
           <p:cNvGraphicFramePr>
             <a:graphicFrameLocks noGrp="true"/>
           </p:cNvGraphicFramePr>

--- a/docs/content/analysis_of_variance/anova_as_regression.pptx
+++ b/docs/content/analysis_of_variance/anova_as_regression.pptx
@@ -4203,7 +4203,7 @@
       </p:sp>
       <p:graphicFrame xmlns:a="http://schemas.openxmlformats.org/drawingml/2006/main" xmlns:r="http://schemas.openxmlformats.org/officeDocument/2006/relationships" xmlns:p="http://schemas.openxmlformats.org/presentationml/2006/main">
         <p:nvGraphicFramePr>
-          <p:cNvPr id="263832832" name=""/>
+          <p:cNvPr id="430194047" name=""/>
           <p:cNvGraphicFramePr>
             <a:graphicFrameLocks noGrp="true"/>
           </p:cNvGraphicFramePr>
@@ -4304,7 +4304,7 @@
       </p:sp>
       <p:graphicFrame xmlns:a="http://schemas.openxmlformats.org/drawingml/2006/main" xmlns:r="http://schemas.openxmlformats.org/officeDocument/2006/relationships" xmlns:p="http://schemas.openxmlformats.org/presentationml/2006/main">
         <p:nvGraphicFramePr>
-          <p:cNvPr id="871969763" name=""/>
+          <p:cNvPr id="868506097" name=""/>
           <p:cNvGraphicFramePr>
             <a:graphicFrameLocks noGrp="true"/>
           </p:cNvGraphicFramePr>
@@ -4887,8 +4887,8 @@
         </p:blipFill>
         <p:spPr bwMode="auto">
           <a:xfrm>
-            <a:off x="3657600" y="1244600"/>
-            <a:ext cx="5232400" cy="3225800"/>
+            <a:off x="4368800" y="952500"/>
+            <a:ext cx="3797300" cy="3797300"/>
           </a:xfrm>
           <a:prstGeom prst="rect">
             <a:avLst/>
@@ -5187,7 +5187,7 @@
       </p:sp>
       <p:graphicFrame xmlns:a="http://schemas.openxmlformats.org/drawingml/2006/main" xmlns:r="http://schemas.openxmlformats.org/officeDocument/2006/relationships" xmlns:p="http://schemas.openxmlformats.org/presentationml/2006/main">
         <p:nvGraphicFramePr>
-          <p:cNvPr id="95619347" name=""/>
+          <p:cNvPr id="635412106" name=""/>
           <p:cNvGraphicFramePr>
             <a:graphicFrameLocks noGrp="true"/>
           </p:cNvGraphicFramePr>
@@ -6541,8 +6541,8 @@
         </p:blipFill>
         <p:spPr bwMode="auto">
           <a:xfrm>
-            <a:off x="3657600" y="1244600"/>
-            <a:ext cx="5232400" cy="3225800"/>
+            <a:off x="4368800" y="952500"/>
+            <a:ext cx="3797300" cy="3797300"/>
           </a:xfrm>
           <a:prstGeom prst="rect">
             <a:avLst/>
@@ -6657,8 +6657,8 @@
         </p:blipFill>
         <p:spPr bwMode="auto">
           <a:xfrm>
-            <a:off x="3657600" y="1244600"/>
-            <a:ext cx="5232400" cy="3225800"/>
+            <a:off x="4368800" y="952500"/>
+            <a:ext cx="3797300" cy="3797300"/>
           </a:xfrm>
           <a:prstGeom prst="rect">
             <a:avLst/>
@@ -6750,7 +6750,7 @@
       </p:sp>
       <p:graphicFrame xmlns:a="http://schemas.openxmlformats.org/drawingml/2006/main" xmlns:r="http://schemas.openxmlformats.org/officeDocument/2006/relationships" xmlns:p="http://schemas.openxmlformats.org/presentationml/2006/main">
         <p:nvGraphicFramePr>
-          <p:cNvPr id="389767074" name=""/>
+          <p:cNvPr id="322555619" name=""/>
           <p:cNvGraphicFramePr>
             <a:graphicFrameLocks noGrp="true"/>
           </p:cNvGraphicFramePr>

--- a/docs/content/analysis_of_variance/anova_as_regression.pptx
+++ b/docs/content/analysis_of_variance/anova_as_regression.pptx
@@ -4203,7 +4203,7 @@
       </p:sp>
       <p:graphicFrame xmlns:a="http://schemas.openxmlformats.org/drawingml/2006/main" xmlns:r="http://schemas.openxmlformats.org/officeDocument/2006/relationships" xmlns:p="http://schemas.openxmlformats.org/presentationml/2006/main">
         <p:nvGraphicFramePr>
-          <p:cNvPr id="430194047" name=""/>
+          <p:cNvPr id="96931934" name=""/>
           <p:cNvGraphicFramePr>
             <a:graphicFrameLocks noGrp="true"/>
           </p:cNvGraphicFramePr>
@@ -4304,7 +4304,7 @@
       </p:sp>
       <p:graphicFrame xmlns:a="http://schemas.openxmlformats.org/drawingml/2006/main" xmlns:r="http://schemas.openxmlformats.org/officeDocument/2006/relationships" xmlns:p="http://schemas.openxmlformats.org/presentationml/2006/main">
         <p:nvGraphicFramePr>
-          <p:cNvPr id="868506097" name=""/>
+          <p:cNvPr id="903658469" name=""/>
           <p:cNvGraphicFramePr>
             <a:graphicFrameLocks noGrp="true"/>
           </p:cNvGraphicFramePr>
@@ -5187,7 +5187,7 @@
       </p:sp>
       <p:graphicFrame xmlns:a="http://schemas.openxmlformats.org/drawingml/2006/main" xmlns:r="http://schemas.openxmlformats.org/officeDocument/2006/relationships" xmlns:p="http://schemas.openxmlformats.org/presentationml/2006/main">
         <p:nvGraphicFramePr>
-          <p:cNvPr id="635412106" name=""/>
+          <p:cNvPr id="149088993" name=""/>
           <p:cNvGraphicFramePr>
             <a:graphicFrameLocks noGrp="true"/>
           </p:cNvGraphicFramePr>
@@ -6750,7 +6750,7 @@
       </p:sp>
       <p:graphicFrame xmlns:a="http://schemas.openxmlformats.org/drawingml/2006/main" xmlns:r="http://schemas.openxmlformats.org/officeDocument/2006/relationships" xmlns:p="http://schemas.openxmlformats.org/presentationml/2006/main">
         <p:nvGraphicFramePr>
-          <p:cNvPr id="322555619" name=""/>
+          <p:cNvPr id="362813941" name=""/>
           <p:cNvGraphicFramePr>
             <a:graphicFrameLocks noGrp="true"/>
           </p:cNvGraphicFramePr>

--- a/docs/content/analysis_of_variance/anova_as_regression.pptx
+++ b/docs/content/analysis_of_variance/anova_as_regression.pptx
@@ -4203,7 +4203,7 @@
       </p:sp>
       <p:graphicFrame xmlns:a="http://schemas.openxmlformats.org/drawingml/2006/main" xmlns:r="http://schemas.openxmlformats.org/officeDocument/2006/relationships" xmlns:p="http://schemas.openxmlformats.org/presentationml/2006/main">
         <p:nvGraphicFramePr>
-          <p:cNvPr id="96931934" name=""/>
+          <p:cNvPr id="107811927" name=""/>
           <p:cNvGraphicFramePr>
             <a:graphicFrameLocks noGrp="true"/>
           </p:cNvGraphicFramePr>
@@ -4304,7 +4304,7 @@
       </p:sp>
       <p:graphicFrame xmlns:a="http://schemas.openxmlformats.org/drawingml/2006/main" xmlns:r="http://schemas.openxmlformats.org/officeDocument/2006/relationships" xmlns:p="http://schemas.openxmlformats.org/presentationml/2006/main">
         <p:nvGraphicFramePr>
-          <p:cNvPr id="903658469" name=""/>
+          <p:cNvPr id="548155229" name=""/>
           <p:cNvGraphicFramePr>
             <a:graphicFrameLocks noGrp="true"/>
           </p:cNvGraphicFramePr>
@@ -5187,7 +5187,7 @@
       </p:sp>
       <p:graphicFrame xmlns:a="http://schemas.openxmlformats.org/drawingml/2006/main" xmlns:r="http://schemas.openxmlformats.org/officeDocument/2006/relationships" xmlns:p="http://schemas.openxmlformats.org/presentationml/2006/main">
         <p:nvGraphicFramePr>
-          <p:cNvPr id="149088993" name=""/>
+          <p:cNvPr id="742723628" name=""/>
           <p:cNvGraphicFramePr>
             <a:graphicFrameLocks noGrp="true"/>
           </p:cNvGraphicFramePr>
@@ -6750,7 +6750,7 @@
       </p:sp>
       <p:graphicFrame xmlns:a="http://schemas.openxmlformats.org/drawingml/2006/main" xmlns:r="http://schemas.openxmlformats.org/officeDocument/2006/relationships" xmlns:p="http://schemas.openxmlformats.org/presentationml/2006/main">
         <p:nvGraphicFramePr>
-          <p:cNvPr id="362813941" name=""/>
+          <p:cNvPr id="830632711" name=""/>
           <p:cNvGraphicFramePr>
             <a:graphicFrameLocks noGrp="true"/>
           </p:cNvGraphicFramePr>

--- a/docs/content/analysis_of_variance/anova_as_regression.pptx
+++ b/docs/content/analysis_of_variance/anova_as_regression.pptx
@@ -4203,7 +4203,7 @@
       </p:sp>
       <p:graphicFrame xmlns:a="http://schemas.openxmlformats.org/drawingml/2006/main" xmlns:r="http://schemas.openxmlformats.org/officeDocument/2006/relationships" xmlns:p="http://schemas.openxmlformats.org/presentationml/2006/main">
         <p:nvGraphicFramePr>
-          <p:cNvPr id="107811927" name=""/>
+          <p:cNvPr id="722137828" name=""/>
           <p:cNvGraphicFramePr>
             <a:graphicFrameLocks noGrp="true"/>
           </p:cNvGraphicFramePr>
@@ -4304,7 +4304,7 @@
       </p:sp>
       <p:graphicFrame xmlns:a="http://schemas.openxmlformats.org/drawingml/2006/main" xmlns:r="http://schemas.openxmlformats.org/officeDocument/2006/relationships" xmlns:p="http://schemas.openxmlformats.org/presentationml/2006/main">
         <p:nvGraphicFramePr>
-          <p:cNvPr id="548155229" name=""/>
+          <p:cNvPr id="639529742" name=""/>
           <p:cNvGraphicFramePr>
             <a:graphicFrameLocks noGrp="true"/>
           </p:cNvGraphicFramePr>
@@ -5187,7 +5187,7 @@
       </p:sp>
       <p:graphicFrame xmlns:a="http://schemas.openxmlformats.org/drawingml/2006/main" xmlns:r="http://schemas.openxmlformats.org/officeDocument/2006/relationships" xmlns:p="http://schemas.openxmlformats.org/presentationml/2006/main">
         <p:nvGraphicFramePr>
-          <p:cNvPr id="742723628" name=""/>
+          <p:cNvPr id="782472059" name=""/>
           <p:cNvGraphicFramePr>
             <a:graphicFrameLocks noGrp="true"/>
           </p:cNvGraphicFramePr>
@@ -6750,7 +6750,7 @@
       </p:sp>
       <p:graphicFrame xmlns:a="http://schemas.openxmlformats.org/drawingml/2006/main" xmlns:r="http://schemas.openxmlformats.org/officeDocument/2006/relationships" xmlns:p="http://schemas.openxmlformats.org/presentationml/2006/main">
         <p:nvGraphicFramePr>
-          <p:cNvPr id="830632711" name=""/>
+          <p:cNvPr id="666757151" name=""/>
           <p:cNvGraphicFramePr>
             <a:graphicFrameLocks noGrp="true"/>
           </p:cNvGraphicFramePr>

--- a/docs/content/analysis_of_variance/anova_as_regression.pptx
+++ b/docs/content/analysis_of_variance/anova_as_regression.pptx
@@ -4203,7 +4203,7 @@
       </p:sp>
       <p:graphicFrame xmlns:a="http://schemas.openxmlformats.org/drawingml/2006/main" xmlns:r="http://schemas.openxmlformats.org/officeDocument/2006/relationships" xmlns:p="http://schemas.openxmlformats.org/presentationml/2006/main">
         <p:nvGraphicFramePr>
-          <p:cNvPr id="722137828" name=""/>
+          <p:cNvPr id="39302669" name=""/>
           <p:cNvGraphicFramePr>
             <a:graphicFrameLocks noGrp="true"/>
           </p:cNvGraphicFramePr>
@@ -4304,7 +4304,7 @@
       </p:sp>
       <p:graphicFrame xmlns:a="http://schemas.openxmlformats.org/drawingml/2006/main" xmlns:r="http://schemas.openxmlformats.org/officeDocument/2006/relationships" xmlns:p="http://schemas.openxmlformats.org/presentationml/2006/main">
         <p:nvGraphicFramePr>
-          <p:cNvPr id="639529742" name=""/>
+          <p:cNvPr id="899421732" name=""/>
           <p:cNvGraphicFramePr>
             <a:graphicFrameLocks noGrp="true"/>
           </p:cNvGraphicFramePr>
@@ -5187,7 +5187,7 @@
       </p:sp>
       <p:graphicFrame xmlns:a="http://schemas.openxmlformats.org/drawingml/2006/main" xmlns:r="http://schemas.openxmlformats.org/officeDocument/2006/relationships" xmlns:p="http://schemas.openxmlformats.org/presentationml/2006/main">
         <p:nvGraphicFramePr>
-          <p:cNvPr id="782472059" name=""/>
+          <p:cNvPr id="495110941" name=""/>
           <p:cNvGraphicFramePr>
             <a:graphicFrameLocks noGrp="true"/>
           </p:cNvGraphicFramePr>
@@ -6750,7 +6750,7 @@
       </p:sp>
       <p:graphicFrame xmlns:a="http://schemas.openxmlformats.org/drawingml/2006/main" xmlns:r="http://schemas.openxmlformats.org/officeDocument/2006/relationships" xmlns:p="http://schemas.openxmlformats.org/presentationml/2006/main">
         <p:nvGraphicFramePr>
-          <p:cNvPr id="666757151" name=""/>
+          <p:cNvPr id="640696925" name=""/>
           <p:cNvGraphicFramePr>
             <a:graphicFrameLocks noGrp="true"/>
           </p:cNvGraphicFramePr>

--- a/docs/content/analysis_of_variance/anova_as_regression.pptx
+++ b/docs/content/analysis_of_variance/anova_as_regression.pptx
@@ -4203,7 +4203,7 @@
       </p:sp>
       <p:graphicFrame xmlns:a="http://schemas.openxmlformats.org/drawingml/2006/main" xmlns:r="http://schemas.openxmlformats.org/officeDocument/2006/relationships" xmlns:p="http://schemas.openxmlformats.org/presentationml/2006/main">
         <p:nvGraphicFramePr>
-          <p:cNvPr id="39302669" name=""/>
+          <p:cNvPr id="668836900" name=""/>
           <p:cNvGraphicFramePr>
             <a:graphicFrameLocks noGrp="true"/>
           </p:cNvGraphicFramePr>
@@ -4304,7 +4304,7 @@
       </p:sp>
       <p:graphicFrame xmlns:a="http://schemas.openxmlformats.org/drawingml/2006/main" xmlns:r="http://schemas.openxmlformats.org/officeDocument/2006/relationships" xmlns:p="http://schemas.openxmlformats.org/presentationml/2006/main">
         <p:nvGraphicFramePr>
-          <p:cNvPr id="899421732" name=""/>
+          <p:cNvPr id="617909576" name=""/>
           <p:cNvGraphicFramePr>
             <a:graphicFrameLocks noGrp="true"/>
           </p:cNvGraphicFramePr>
@@ -5187,7 +5187,7 @@
       </p:sp>
       <p:graphicFrame xmlns:a="http://schemas.openxmlformats.org/drawingml/2006/main" xmlns:r="http://schemas.openxmlformats.org/officeDocument/2006/relationships" xmlns:p="http://schemas.openxmlformats.org/presentationml/2006/main">
         <p:nvGraphicFramePr>
-          <p:cNvPr id="495110941" name=""/>
+          <p:cNvPr id="342327204" name=""/>
           <p:cNvGraphicFramePr>
             <a:graphicFrameLocks noGrp="true"/>
           </p:cNvGraphicFramePr>
@@ -6750,7 +6750,7 @@
       </p:sp>
       <p:graphicFrame xmlns:a="http://schemas.openxmlformats.org/drawingml/2006/main" xmlns:r="http://schemas.openxmlformats.org/officeDocument/2006/relationships" xmlns:p="http://schemas.openxmlformats.org/presentationml/2006/main">
         <p:nvGraphicFramePr>
-          <p:cNvPr id="640696925" name=""/>
+          <p:cNvPr id="955791154" name=""/>
           <p:cNvGraphicFramePr>
             <a:graphicFrameLocks noGrp="true"/>
           </p:cNvGraphicFramePr>

--- a/docs/content/analysis_of_variance/anova_as_regression.pptx
+++ b/docs/content/analysis_of_variance/anova_as_regression.pptx
@@ -4203,7 +4203,7 @@
       </p:sp>
       <p:graphicFrame xmlns:a="http://schemas.openxmlformats.org/drawingml/2006/main" xmlns:r="http://schemas.openxmlformats.org/officeDocument/2006/relationships" xmlns:p="http://schemas.openxmlformats.org/presentationml/2006/main">
         <p:nvGraphicFramePr>
-          <p:cNvPr id="668836900" name=""/>
+          <p:cNvPr id="792832180" name=""/>
           <p:cNvGraphicFramePr>
             <a:graphicFrameLocks noGrp="true"/>
           </p:cNvGraphicFramePr>
@@ -4304,7 +4304,7 @@
       </p:sp>
       <p:graphicFrame xmlns:a="http://schemas.openxmlformats.org/drawingml/2006/main" xmlns:r="http://schemas.openxmlformats.org/officeDocument/2006/relationships" xmlns:p="http://schemas.openxmlformats.org/presentationml/2006/main">
         <p:nvGraphicFramePr>
-          <p:cNvPr id="617909576" name=""/>
+          <p:cNvPr id="849073687" name=""/>
           <p:cNvGraphicFramePr>
             <a:graphicFrameLocks noGrp="true"/>
           </p:cNvGraphicFramePr>
@@ -5187,7 +5187,7 @@
       </p:sp>
       <p:graphicFrame xmlns:a="http://schemas.openxmlformats.org/drawingml/2006/main" xmlns:r="http://schemas.openxmlformats.org/officeDocument/2006/relationships" xmlns:p="http://schemas.openxmlformats.org/presentationml/2006/main">
         <p:nvGraphicFramePr>
-          <p:cNvPr id="342327204" name=""/>
+          <p:cNvPr id="400484628" name=""/>
           <p:cNvGraphicFramePr>
             <a:graphicFrameLocks noGrp="true"/>
           </p:cNvGraphicFramePr>
@@ -6750,7 +6750,7 @@
       </p:sp>
       <p:graphicFrame xmlns:a="http://schemas.openxmlformats.org/drawingml/2006/main" xmlns:r="http://schemas.openxmlformats.org/officeDocument/2006/relationships" xmlns:p="http://schemas.openxmlformats.org/presentationml/2006/main">
         <p:nvGraphicFramePr>
-          <p:cNvPr id="955791154" name=""/>
+          <p:cNvPr id="746310312" name=""/>
           <p:cNvGraphicFramePr>
             <a:graphicFrameLocks noGrp="true"/>
           </p:cNvGraphicFramePr>
